--- a/10-plantas/01-steelmaking/05-capacitacion/MO-CC1-01/MO-CC1-01_Capacitacion_AMMX.pptx
+++ b/10-plantas/01-steelmaking/05-capacitacion/MO-CC1-01/MO-CC1-01_Capacitacion_AMMX.pptx
@@ -3673,7 +3673,7 @@
                 <a:ea typeface="Century Gothic" pitchFamily="34" charset="-122"/>
                 <a:cs typeface="Century Gothic" pitchFamily="34" charset="-120"/>
               </a:rPr>
-              <a:t>Para: S-15 Preparador de Distribuidores · S-13 Operador de Plataforma de Colada · Operador de grúa de CC · C-06</a:t>
+              <a:t>Para: S-15 Preparador de Distribuidores · S-13 Operador de Plataforma de Colada · Grúa de CC 50 t (hoy S-15) · C-06</a:t>
             </a:r>
             <a:endParaRPr lang="en-US" sz="1100" dirty="0"/>
           </a:p>
@@ -17033,7 +17033,7 @@
                           <a:ea typeface="Century Gothic" pitchFamily="34" charset="-122"/>
                           <a:cs typeface="Century Gothic" pitchFamily="34" charset="-120"/>
                         </a:rPr>
-                        <a:t>Operador de grúa de CC</a:t>
+                        <a:t>Grúa de CC (hoy S-15)</a:t>
                       </a:r>
                       <a:endParaRPr lang="en-US" sz="950" dirty="0">
                         <a:latin typeface="Century Gothic" charset="0"/>
@@ -20307,7 +20307,7 @@
                 <a:ea typeface="Calibri" pitchFamily="34" charset="-122"/>
                 <a:cs typeface="Calibri" pitchFamily="34" charset="-120"/>
               </a:rPr>
-              <a:t>Siguiente paso: OJT supervisado y evaluación práctica (TD-P07); registro en IMaS y DC-3/SIRCE. Validación: visto bueno técnica (pendientes: seguridad, laboral, diseño instruccional).</a:t>
+              <a:t>Siguiente paso: OJT supervisado y evaluación práctica (TD-P07); registro en IMaS y DC-3/SIRCE. Validación: visto bueno técnica, seguridad, laboral, diseño instruccional.</a:t>
             </a:r>
             <a:endParaRPr lang="en-US" sz="750" dirty="0"/>
           </a:p>
@@ -21679,7 +21679,7 @@
                 <a:ea typeface="Century Gothic" pitchFamily="34" charset="-122"/>
                 <a:cs typeface="Century Gothic" pitchFamily="34" charset="-120"/>
               </a:rPr>
-              <a:t>Trabajar sin exponerte</a:t>
+              <a:t>Aplicar permisos, LOTO e izaje seguro</a:t>
             </a:r>
             <a:endParaRPr lang="en-US" sz="1350" dirty="0"/>
           </a:p>
@@ -25323,8 +25323,8 @@
         </p:blipFill>
         <p:spPr>
           <a:xfrm>
-            <a:off x="611594" y="1417320"/>
-            <a:ext cx="6640651" cy="4846320"/>
+            <a:off x="612523" y="1417320"/>
+            <a:ext cx="6638795" cy="4846320"/>
           </a:xfrm>
           <a:prstGeom prst="rect">
             <a:avLst/>
@@ -31413,7 +31413,7 @@
                 <a:ea typeface="Century Gothic" pitchFamily="34" charset="-122"/>
                 <a:cs typeface="Century Gothic" pitchFamily="34" charset="-120"/>
               </a:rPr>
-              <a:t>Humedad, carga suspendida y espacio confinado</a:t>
+              <a:t>Humedad, carga suspendida y confinado: sin atajos</a:t>
             </a:r>
             <a:endParaRPr lang="en-US" sz="2400" dirty="0"/>
           </a:p>
